--- a/Python Numpy.pptx
+++ b/Python Numpy.pptx
@@ -5,10 +5,10 @@
     <p:sldMasterId id="2147483648" r:id="rId1"/>
   </p:sldMasterIdLst>
   <p:notesMasterIdLst>
-    <p:notesMasterId r:id="rId19"/>
+    <p:notesMasterId r:id="rId20"/>
   </p:notesMasterIdLst>
   <p:handoutMasterIdLst>
-    <p:handoutMasterId r:id="rId20"/>
+    <p:handoutMasterId r:id="rId21"/>
   </p:handoutMasterIdLst>
   <p:sldIdLst>
     <p:sldId id="256" r:id="rId3"/>
@@ -27,6 +27,7 @@
     <p:sldId id="269" r:id="rId16"/>
     <p:sldId id="270" r:id="rId17"/>
     <p:sldId id="271" r:id="rId18"/>
+    <p:sldId id="272" r:id="rId19"/>
   </p:sldIdLst>
   <p:sldSz cx="12192000" cy="6858000"/>
   <p:notesSz cx="7103745" cy="10234295"/>
@@ -776,7 +777,7 @@
               <a:effectLst/>
               <a:uLnTx/>
               <a:uFillTx/>
-              <a:latin typeface="Arial" panose="02080604020202020204" pitchFamily="34" charset="0"/>
+              <a:latin typeface="Arial" panose="020B0604020202020204" pitchFamily="34" charset="0"/>
               <a:ea typeface="SimSun" pitchFamily="2" charset="-122"/>
               <a:cs typeface="+mn-cs"/>
             </a:endParaRPr>
@@ -1317,7 +1318,7 @@
               <a:effectLst/>
               <a:uLnTx/>
               <a:uFillTx/>
-              <a:latin typeface="Arial" panose="02080604020202020204" pitchFamily="34" charset="0"/>
+              <a:latin typeface="Arial" panose="020B0604020202020204" pitchFamily="34" charset="0"/>
               <a:ea typeface="SimSun" pitchFamily="2" charset="-122"/>
               <a:cs typeface="+mn-cs"/>
             </a:endParaRPr>
@@ -1364,7 +1365,7 @@
               <a:effectLst/>
               <a:uLnTx/>
               <a:uFillTx/>
-              <a:latin typeface="Arial" panose="02080604020202020204" pitchFamily="34" charset="0"/>
+              <a:latin typeface="Arial" panose="020B0604020202020204" pitchFamily="34" charset="0"/>
               <a:ea typeface="SimSun" pitchFamily="2" charset="-122"/>
               <a:cs typeface="+mn-cs"/>
             </a:endParaRPr>
@@ -1412,7 +1413,7 @@
                 <a:effectLst/>
                 <a:uLnTx/>
                 <a:uFillTx/>
-                <a:latin typeface="Arial" panose="02080604020202020204" pitchFamily="34" charset="0"/>
+                <a:latin typeface="Arial" panose="020B0604020202020204" pitchFamily="34" charset="0"/>
                 <a:ea typeface="SimSun" pitchFamily="2" charset="-122"/>
                 <a:cs typeface="+mn-cs"/>
               </a:rPr>
@@ -1427,7 +1428,7 @@
               <a:effectLst/>
               <a:uLnTx/>
               <a:uFillTx/>
-              <a:latin typeface="Arial" panose="02080604020202020204" pitchFamily="34" charset="0"/>
+              <a:latin typeface="Arial" panose="020B0604020202020204" pitchFamily="34" charset="0"/>
               <a:ea typeface="SimSun" pitchFamily="2" charset="-122"/>
               <a:cs typeface="+mn-cs"/>
             </a:endParaRPr>
@@ -3005,7 +3006,7 @@
               <a:effectLst/>
               <a:uLnTx/>
               <a:uFillTx/>
-              <a:latin typeface="Arial" panose="02080604020202020204" pitchFamily="34" charset="0"/>
+              <a:latin typeface="Arial" panose="020B0604020202020204" pitchFamily="34" charset="0"/>
               <a:ea typeface="SimSun" pitchFamily="2" charset="-122"/>
               <a:cs typeface="+mn-cs"/>
             </a:endParaRPr>
@@ -3052,7 +3053,7 @@
               <a:effectLst/>
               <a:uLnTx/>
               <a:uFillTx/>
-              <a:latin typeface="Arial" panose="02080604020202020204" pitchFamily="34" charset="0"/>
+              <a:latin typeface="Arial" panose="020B0604020202020204" pitchFamily="34" charset="0"/>
               <a:ea typeface="SimSun" pitchFamily="2" charset="-122"/>
               <a:cs typeface="+mn-cs"/>
             </a:endParaRPr>
@@ -3100,7 +3101,7 @@
                 <a:effectLst/>
                 <a:uLnTx/>
                 <a:uFillTx/>
-                <a:latin typeface="Arial" panose="02080604020202020204" pitchFamily="34" charset="0"/>
+                <a:latin typeface="Arial" panose="020B0604020202020204" pitchFamily="34" charset="0"/>
                 <a:ea typeface="SimSun" pitchFamily="2" charset="-122"/>
                 <a:cs typeface="+mn-cs"/>
               </a:rPr>
@@ -3115,7 +3116,7 @@
               <a:effectLst/>
               <a:uLnTx/>
               <a:uFillTx/>
-              <a:latin typeface="Arial" panose="02080604020202020204" pitchFamily="34" charset="0"/>
+              <a:latin typeface="Arial" panose="020B0604020202020204" pitchFamily="34" charset="0"/>
               <a:ea typeface="SimSun" pitchFamily="2" charset="-122"/>
               <a:cs typeface="+mn-cs"/>
             </a:endParaRPr>
@@ -3542,7 +3543,7 @@
               <a:effectLst/>
               <a:uLnTx/>
               <a:uFillTx/>
-              <a:latin typeface="Arial" panose="02080604020202020204" pitchFamily="34" charset="0"/>
+              <a:latin typeface="Arial" panose="020B0604020202020204" pitchFamily="34" charset="0"/>
               <a:ea typeface="SimSun" pitchFamily="2" charset="-122"/>
               <a:cs typeface="+mn-cs"/>
             </a:endParaRPr>
@@ -4137,7 +4138,7 @@
           <a:solidFill>
             <a:schemeClr val="tx2"/>
           </a:solidFill>
-          <a:latin typeface="Arial" panose="02080604020202020204" pitchFamily="34" charset="0"/>
+          <a:latin typeface="Arial" panose="020B0604020202020204" pitchFamily="34" charset="0"/>
           <a:ea typeface="SimSun" pitchFamily="2" charset="-122"/>
         </a:defRPr>
       </a:lvl2pPr>
@@ -4152,7 +4153,7 @@
           <a:solidFill>
             <a:schemeClr val="tx2"/>
           </a:solidFill>
-          <a:latin typeface="Arial" panose="02080604020202020204" pitchFamily="34" charset="0"/>
+          <a:latin typeface="Arial" panose="020B0604020202020204" pitchFamily="34" charset="0"/>
           <a:ea typeface="SimSun" pitchFamily="2" charset="-122"/>
         </a:defRPr>
       </a:lvl3pPr>
@@ -4167,7 +4168,7 @@
           <a:solidFill>
             <a:schemeClr val="tx2"/>
           </a:solidFill>
-          <a:latin typeface="Arial" panose="02080604020202020204" pitchFamily="34" charset="0"/>
+          <a:latin typeface="Arial" panose="020B0604020202020204" pitchFamily="34" charset="0"/>
           <a:ea typeface="SimSun" pitchFamily="2" charset="-122"/>
         </a:defRPr>
       </a:lvl4pPr>
@@ -4182,7 +4183,7 @@
           <a:solidFill>
             <a:schemeClr val="tx2"/>
           </a:solidFill>
-          <a:latin typeface="Arial" panose="02080604020202020204" pitchFamily="34" charset="0"/>
+          <a:latin typeface="Arial" panose="020B0604020202020204" pitchFamily="34" charset="0"/>
           <a:ea typeface="SimSun" pitchFamily="2" charset="-122"/>
         </a:defRPr>
       </a:lvl5pPr>
@@ -4197,7 +4198,7 @@
           <a:solidFill>
             <a:schemeClr val="tx2"/>
           </a:solidFill>
-          <a:latin typeface="Arial" panose="02080604020202020204" pitchFamily="34" charset="0"/>
+          <a:latin typeface="Arial" panose="020B0604020202020204" pitchFamily="34" charset="0"/>
           <a:ea typeface="SimSun" pitchFamily="2" charset="-122"/>
         </a:defRPr>
       </a:lvl6pPr>
@@ -4212,7 +4213,7 @@
           <a:solidFill>
             <a:schemeClr val="tx2"/>
           </a:solidFill>
-          <a:latin typeface="Arial" panose="02080604020202020204" pitchFamily="34" charset="0"/>
+          <a:latin typeface="Arial" panose="020B0604020202020204" pitchFamily="34" charset="0"/>
           <a:ea typeface="SimSun" pitchFamily="2" charset="-122"/>
         </a:defRPr>
       </a:lvl7pPr>
@@ -4227,7 +4228,7 @@
           <a:solidFill>
             <a:schemeClr val="tx2"/>
           </a:solidFill>
-          <a:latin typeface="Arial" panose="02080604020202020204" pitchFamily="34" charset="0"/>
+          <a:latin typeface="Arial" panose="020B0604020202020204" pitchFamily="34" charset="0"/>
           <a:ea typeface="SimSun" pitchFamily="2" charset="-122"/>
         </a:defRPr>
       </a:lvl8pPr>
@@ -4242,7 +4243,7 @@
           <a:solidFill>
             <a:schemeClr val="tx2"/>
           </a:solidFill>
-          <a:latin typeface="Arial" panose="02080604020202020204" pitchFamily="34" charset="0"/>
+          <a:latin typeface="Arial" panose="020B0604020202020204" pitchFamily="34" charset="0"/>
           <a:ea typeface="SimSun" pitchFamily="2" charset="-122"/>
         </a:defRPr>
       </a:lvl9pPr>
@@ -4340,7 +4341,7 @@
         <a:spcBef>
           <a:spcPts val="500"/>
         </a:spcBef>
-        <a:buFont typeface="Arial" panose="02080604020202020204" pitchFamily="34" charset="0"/>
+        <a:buFont typeface="Arial" panose="020B0604020202020204" pitchFamily="34" charset="0"/>
         <a:buChar char="•"/>
         <a:defRPr sz="1800" kern="1200">
           <a:solidFill>
@@ -4358,7 +4359,7 @@
         <a:spcBef>
           <a:spcPts val="500"/>
         </a:spcBef>
-        <a:buFont typeface="Arial" panose="02080604020202020204" pitchFamily="34" charset="0"/>
+        <a:buFont typeface="Arial" panose="020B0604020202020204" pitchFamily="34" charset="0"/>
         <a:buChar char="•"/>
         <a:defRPr sz="1800" kern="1200">
           <a:solidFill>
@@ -4376,7 +4377,7 @@
         <a:spcBef>
           <a:spcPts val="500"/>
         </a:spcBef>
-        <a:buFont typeface="Arial" panose="02080604020202020204" pitchFamily="34" charset="0"/>
+        <a:buFont typeface="Arial" panose="020B0604020202020204" pitchFamily="34" charset="0"/>
         <a:buChar char="•"/>
         <a:defRPr sz="1800" kern="1200">
           <a:solidFill>
@@ -4394,7 +4395,7 @@
         <a:spcBef>
           <a:spcPts val="500"/>
         </a:spcBef>
-        <a:buFont typeface="Arial" panose="02080604020202020204" pitchFamily="34" charset="0"/>
+        <a:buFont typeface="Arial" panose="020B0604020202020204" pitchFamily="34" charset="0"/>
         <a:buChar char="•"/>
         <a:defRPr sz="1800" kern="1200">
           <a:solidFill>
@@ -5319,6 +5320,68 @@
               <a:t>V - fixed chunk of memory for other type ( void )</a:t>
             </a:r>
             <a:endParaRPr lang="en-US" sz="2000"/>
+          </a:p>
+        </p:txBody>
+      </p:sp>
+    </p:spTree>
+  </p:cSld>
+  <p:clrMapOvr>
+    <a:masterClrMapping/>
+  </p:clrMapOvr>
+</p:sld>
+</file>
+
+<file path=ppt/slides/slide17.xml><?xml version="1.0" encoding="utf-8"?>
+<p:sld xmlns:a="http://schemas.openxmlformats.org/drawingml/2006/main" xmlns:r="http://schemas.openxmlformats.org/officeDocument/2006/relationships" xmlns:p="http://schemas.openxmlformats.org/presentationml/2006/main">
+  <p:cSld>
+    <p:spTree>
+      <p:nvGrpSpPr>
+        <p:cNvPr id="1" name=""/>
+        <p:cNvGrpSpPr/>
+        <p:nvPr/>
+      </p:nvGrpSpPr>
+      <p:grpSpPr/>
+      <p:sp>
+        <p:nvSpPr>
+          <p:cNvPr id="2" name="Title 1"/>
+          <p:cNvSpPr>
+            <a:spLocks noGrp="1"/>
+          </p:cNvSpPr>
+          <p:nvPr>
+            <p:ph type="title"/>
+          </p:nvPr>
+        </p:nvSpPr>
+        <p:spPr/>
+        <p:txBody>
+          <a:bodyPr/>
+          <a:p>
+            <a:r>
+              <a:rPr lang="en-US"/>
+              <a:t>NumPy Array Copy vs View</a:t>
+            </a:r>
+            <a:endParaRPr lang="en-US"/>
+          </a:p>
+        </p:txBody>
+      </p:sp>
+      <p:sp>
+        <p:nvSpPr>
+          <p:cNvPr id="3" name="Content Placeholder 2"/>
+          <p:cNvSpPr>
+            <a:spLocks noGrp="1"/>
+          </p:cNvSpPr>
+          <p:nvPr>
+            <p:ph idx="1"/>
+          </p:nvPr>
+        </p:nvSpPr>
+        <p:spPr/>
+        <p:txBody>
+          <a:bodyPr/>
+          <a:p>
+            <a:r>
+              <a:rPr lang="en-US"/>
+              <a:t>NumPy Array Shape</a:t>
+            </a:r>
+            <a:endParaRPr lang="en-US"/>
           </a:p>
         </p:txBody>
       </p:sp>
@@ -6690,7 +6753,7 @@
               <a:schemeClr val="tx1"/>
             </a:solidFill>
             <a:effectLst/>
-            <a:latin typeface="Arial" panose="02080604020202020204" pitchFamily="34" charset="0"/>
+            <a:latin typeface="Arial" panose="020B0604020202020204" pitchFamily="34" charset="0"/>
             <a:ea typeface="SimSun" pitchFamily="2" charset="-122"/>
           </a:defRPr>
         </a:defPPr>
@@ -6755,7 +6818,7 @@
               <a:schemeClr val="tx1"/>
             </a:solidFill>
             <a:effectLst/>
-            <a:latin typeface="Arial" panose="02080604020202020204" pitchFamily="34" charset="0"/>
+            <a:latin typeface="Arial" panose="020B0604020202020204" pitchFamily="34" charset="0"/>
             <a:ea typeface="SimSun" pitchFamily="2" charset="-122"/>
           </a:defRPr>
         </a:defPPr>

--- a/Python Numpy.pptx
+++ b/Python Numpy.pptx
@@ -5,29 +5,33 @@
     <p:sldMasterId id="2147483648" r:id="rId1"/>
   </p:sldMasterIdLst>
   <p:notesMasterIdLst>
-    <p:notesMasterId r:id="rId20"/>
+    <p:notesMasterId r:id="rId24"/>
   </p:notesMasterIdLst>
   <p:handoutMasterIdLst>
-    <p:handoutMasterId r:id="rId21"/>
+    <p:handoutMasterId r:id="rId25"/>
   </p:handoutMasterIdLst>
   <p:sldIdLst>
     <p:sldId id="256" r:id="rId3"/>
     <p:sldId id="257" r:id="rId4"/>
-    <p:sldId id="258" r:id="rId5"/>
-    <p:sldId id="259" r:id="rId6"/>
-    <p:sldId id="260" r:id="rId7"/>
-    <p:sldId id="261" r:id="rId8"/>
-    <p:sldId id="262" r:id="rId9"/>
-    <p:sldId id="263" r:id="rId10"/>
-    <p:sldId id="264" r:id="rId11"/>
-    <p:sldId id="265" r:id="rId12"/>
-    <p:sldId id="266" r:id="rId13"/>
-    <p:sldId id="267" r:id="rId14"/>
-    <p:sldId id="268" r:id="rId15"/>
-    <p:sldId id="269" r:id="rId16"/>
-    <p:sldId id="270" r:id="rId17"/>
-    <p:sldId id="271" r:id="rId18"/>
-    <p:sldId id="272" r:id="rId19"/>
+    <p:sldId id="274" r:id="rId5"/>
+    <p:sldId id="258" r:id="rId6"/>
+    <p:sldId id="259" r:id="rId7"/>
+    <p:sldId id="260" r:id="rId8"/>
+    <p:sldId id="261" r:id="rId9"/>
+    <p:sldId id="262" r:id="rId10"/>
+    <p:sldId id="263" r:id="rId11"/>
+    <p:sldId id="264" r:id="rId12"/>
+    <p:sldId id="265" r:id="rId13"/>
+    <p:sldId id="266" r:id="rId14"/>
+    <p:sldId id="267" r:id="rId15"/>
+    <p:sldId id="268" r:id="rId16"/>
+    <p:sldId id="269" r:id="rId17"/>
+    <p:sldId id="270" r:id="rId18"/>
+    <p:sldId id="271" r:id="rId19"/>
+    <p:sldId id="272" r:id="rId20"/>
+    <p:sldId id="273" r:id="rId21"/>
+    <p:sldId id="275" r:id="rId22"/>
+    <p:sldId id="276" r:id="rId23"/>
   </p:sldIdLst>
   <p:sldSz cx="12192000" cy="6858000"/>
   <p:notesSz cx="7103745" cy="10234295"/>
@@ -4609,38 +4613,43 @@
           <a:bodyPr/>
           <a:p>
             <a:r>
+              <a:rPr lang="en-US">
+                <a:sym typeface="+mn-ea"/>
+              </a:rPr>
+              <a:t>1-D array.</a:t>
+            </a:r>
+            <a:endParaRPr lang="en-US"/>
+          </a:p>
+        </p:txBody>
+      </p:sp>
+      <p:sp>
+        <p:nvSpPr>
+          <p:cNvPr id="3" name="Content Placeholder 2"/>
+          <p:cNvSpPr>
+            <a:spLocks noGrp="1"/>
+          </p:cNvSpPr>
+          <p:nvPr>
+            <p:ph idx="1"/>
+          </p:nvPr>
+        </p:nvSpPr>
+        <p:spPr/>
+        <p:txBody>
+          <a:bodyPr/>
+          <a:p>
+            <a:r>
               <a:rPr lang="en-US"/>
-              <a:t>2-D Arrays</a:t>
+              <a:t>An array that has 0-D arrays as its elements is called uni-dimensional or 1-D array.</a:t>
             </a:r>
             <a:endParaRPr lang="en-US"/>
           </a:p>
-        </p:txBody>
-      </p:sp>
-      <p:sp>
-        <p:nvSpPr>
-          <p:cNvPr id="3" name="Content Placeholder 2"/>
-          <p:cNvSpPr>
-            <a:spLocks noGrp="1"/>
-          </p:cNvSpPr>
-          <p:nvPr>
-            <p:ph idx="1"/>
-          </p:nvPr>
-        </p:nvSpPr>
-        <p:spPr/>
-        <p:txBody>
-          <a:bodyPr/>
           <a:p>
             <a:r>
               <a:rPr lang="en-US"/>
-              <a:t>An array that has 1-D arrays as its elements is called a 2-D array.</a:t>
+              <a:t>These are the most common and basic arrays.</a:t>
             </a:r>
             <a:endParaRPr lang="en-US"/>
           </a:p>
           <a:p>
-            <a:r>
-              <a:rPr lang="en-US"/>
-              <a:t>These are often used to represent matrix or 2nd order tensors.</a:t>
-            </a:r>
             <a:endParaRPr lang="en-US"/>
           </a:p>
           <a:p>
@@ -4649,6 +4658,13 @@
                 <a:solidFill>
                   <a:srgbClr val="FF0000"/>
                 </a:solidFill>
+                <a:effectLst>
+                  <a:outerShdw blurRad="38100" dist="19050" dir="2700000" algn="tl" rotWithShape="0">
+                    <a:schemeClr val="dk1">
+                      <a:alpha val="40000"/>
+                    </a:schemeClr>
+                  </a:outerShdw>
+                </a:effectLst>
               </a:rPr>
               <a:t>import numpy as np</a:t>
             </a:r>
@@ -4656,6 +4672,13 @@
               <a:solidFill>
                 <a:srgbClr val="FF0000"/>
               </a:solidFill>
+              <a:effectLst>
+                <a:outerShdw blurRad="38100" dist="19050" dir="2700000" algn="tl" rotWithShape="0">
+                  <a:schemeClr val="dk1">
+                    <a:alpha val="40000"/>
+                  </a:schemeClr>
+                </a:outerShdw>
+              </a:effectLst>
             </a:endParaRPr>
           </a:p>
           <a:p>
@@ -4664,13 +4687,27 @@
                 <a:solidFill>
                   <a:srgbClr val="FF0000"/>
                 </a:solidFill>
+                <a:effectLst>
+                  <a:outerShdw blurRad="38100" dist="19050" dir="2700000" algn="tl" rotWithShape="0">
+                    <a:schemeClr val="dk1">
+                      <a:alpha val="40000"/>
+                    </a:schemeClr>
+                  </a:outerShdw>
+                </a:effectLst>
               </a:rPr>
-              <a:t>arr = np.array([[1, 2, 3], [4, 5, 6]])</a:t>
+              <a:t>arr = np.array([1, 2, 3, 4, 5])</a:t>
             </a:r>
             <a:endParaRPr lang="en-US" b="1">
               <a:solidFill>
                 <a:srgbClr val="FF0000"/>
               </a:solidFill>
+              <a:effectLst>
+                <a:outerShdw blurRad="38100" dist="19050" dir="2700000" algn="tl" rotWithShape="0">
+                  <a:schemeClr val="dk1">
+                    <a:alpha val="40000"/>
+                  </a:schemeClr>
+                </a:outerShdw>
+              </a:effectLst>
             </a:endParaRPr>
           </a:p>
           <a:p>
@@ -4679,6 +4716,13 @@
                 <a:solidFill>
                   <a:srgbClr val="FF0000"/>
                 </a:solidFill>
+                <a:effectLst>
+                  <a:outerShdw blurRad="38100" dist="19050" dir="2700000" algn="tl" rotWithShape="0">
+                    <a:schemeClr val="dk1">
+                      <a:alpha val="40000"/>
+                    </a:schemeClr>
+                  </a:outerShdw>
+                </a:effectLst>
               </a:rPr>
               <a:t>print(arr)</a:t>
             </a:r>
@@ -4686,6 +4730,13 @@
               <a:solidFill>
                 <a:srgbClr val="FF0000"/>
               </a:solidFill>
+              <a:effectLst>
+                <a:outerShdw blurRad="38100" dist="19050" dir="2700000" algn="tl" rotWithShape="0">
+                  <a:schemeClr val="dk1">
+                    <a:alpha val="40000"/>
+                  </a:schemeClr>
+                </a:outerShdw>
+              </a:effectLst>
             </a:endParaRPr>
           </a:p>
         </p:txBody>
@@ -4724,7 +4775,7 @@
           <a:p>
             <a:r>
               <a:rPr lang="en-US"/>
-              <a:t>3-D arrays</a:t>
+              <a:t>2-D Arrays</a:t>
             </a:r>
             <a:endParaRPr lang="en-US"/>
           </a:p>
@@ -4746,18 +4797,15 @@
           <a:p>
             <a:r>
               <a:rPr lang="en-US"/>
-              <a:t>An array that has 2-D arrays (matrices) as its elements is called 3-D array.</a:t>
+              <a:t>An array that has 1-D arrays as its elements is called a 2-D array.</a:t>
             </a:r>
             <a:endParaRPr lang="en-US"/>
           </a:p>
           <a:p>
             <a:r>
               <a:rPr lang="en-US"/>
-              <a:t>These are often used to represent a 3rd order tensor.</a:t>
-            </a:r>
-            <a:endParaRPr lang="en-US"/>
-          </a:p>
-          <a:p>
+              <a:t>These are often used to represent matrix or 2nd order tensors.</a:t>
+            </a:r>
             <a:endParaRPr lang="en-US"/>
           </a:p>
           <a:p>
@@ -4782,7 +4830,7 @@
                   <a:srgbClr val="FF0000"/>
                 </a:solidFill>
               </a:rPr>
-              <a:t>arr = np.array([[[1, 2, 3], [4, 5, 6]], [[1, 2, 3], [4, 5, 6]]])</a:t>
+              <a:t>arr = np.array([[1, 2, 3], [4, 5, 6]])</a:t>
             </a:r>
             <a:endParaRPr lang="en-US" b="1">
               <a:solidFill>
@@ -4841,7 +4889,7 @@
           <a:p>
             <a:r>
               <a:rPr lang="en-US"/>
-              <a:t>5 dimensions</a:t>
+              <a:t>3-D arrays</a:t>
             </a:r>
             <a:endParaRPr lang="en-US"/>
           </a:p>
@@ -4863,36 +4911,64 @@
           <a:p>
             <a:r>
               <a:rPr lang="en-US"/>
+              <a:t>An array that has 2-D arrays (matrices) as its elements is called 3-D array.</a:t>
+            </a:r>
+            <a:endParaRPr lang="en-US"/>
+          </a:p>
+          <a:p>
+            <a:r>
+              <a:rPr lang="en-US"/>
+              <a:t>These are often used to represent a 3rd order tensor.</a:t>
+            </a:r>
+            <a:endParaRPr lang="en-US"/>
+          </a:p>
+          <a:p>
+            <a:endParaRPr lang="en-US"/>
+          </a:p>
+          <a:p>
+            <a:r>
+              <a:rPr lang="en-US" b="1">
+                <a:solidFill>
+                  <a:srgbClr val="FF0000"/>
+                </a:solidFill>
+              </a:rPr>
               <a:t>import numpy as np</a:t>
             </a:r>
-            <a:endParaRPr lang="en-US"/>
-          </a:p>
-          <a:p>
-            <a:endParaRPr lang="en-US"/>
-          </a:p>
-          <a:p>
-            <a:r>
-              <a:rPr lang="en-US"/>
-              <a:t>arr = np.array([1, 2, 3, 4], ndmin=6)</a:t>
-            </a:r>
-            <a:endParaRPr lang="en-US"/>
-          </a:p>
-          <a:p>
-            <a:endParaRPr lang="en-US"/>
-          </a:p>
-          <a:p>
-            <a:r>
-              <a:rPr lang="en-US"/>
+            <a:endParaRPr lang="en-US" b="1">
+              <a:solidFill>
+                <a:srgbClr val="FF0000"/>
+              </a:solidFill>
+            </a:endParaRPr>
+          </a:p>
+          <a:p>
+            <a:r>
+              <a:rPr lang="en-US" b="1">
+                <a:solidFill>
+                  <a:srgbClr val="FF0000"/>
+                </a:solidFill>
+              </a:rPr>
+              <a:t>arr = np.array([[[1, 2, 3], [4, 5, 6]], [[1, 2, 3], [4, 5, 6]]])</a:t>
+            </a:r>
+            <a:endParaRPr lang="en-US" b="1">
+              <a:solidFill>
+                <a:srgbClr val="FF0000"/>
+              </a:solidFill>
+            </a:endParaRPr>
+          </a:p>
+          <a:p>
+            <a:r>
+              <a:rPr lang="en-US" b="1">
+                <a:solidFill>
+                  <a:srgbClr val="FF0000"/>
+                </a:solidFill>
+              </a:rPr>
               <a:t>print(arr)</a:t>
             </a:r>
-            <a:endParaRPr lang="en-US"/>
-          </a:p>
-          <a:p>
-            <a:r>
-              <a:rPr lang="en-US"/>
-              <a:t>print('number of dimensions :', arr.ndim)</a:t>
-            </a:r>
-            <a:endParaRPr lang="en-US"/>
+            <a:endParaRPr lang="en-US" b="1">
+              <a:solidFill>
+                <a:srgbClr val="FF0000"/>
+              </a:solidFill>
+            </a:endParaRPr>
           </a:p>
         </p:txBody>
       </p:sp>
@@ -4930,13 +5006,9 @@
           <a:p>
             <a:r>
               <a:rPr lang="en-US"/>
-              <a:t>NumPy - Indexing, Accessing Array Elemen</a:t>
-            </a:r>
-            <a:r>
-              <a:rPr lang="en-IN" altLang="en-US"/>
-              <a:t>t</a:t>
-            </a:r>
-            <a:endParaRPr lang="en-IN" altLang="en-US"/>
+              <a:t>5 dimensions</a:t>
+            </a:r>
+            <a:endParaRPr lang="en-US"/>
           </a:p>
         </p:txBody>
       </p:sp>
@@ -4956,19 +5028,36 @@
           <a:p>
             <a:r>
               <a:rPr lang="en-US"/>
-              <a:t>Array indexing is the same as accessing an array element.</a:t>
+              <a:t>import numpy as np</a:t>
             </a:r>
             <a:endParaRPr lang="en-US"/>
           </a:p>
           <a:p>
-            <a:r>
-              <a:rPr lang="en-IN" altLang="en-US"/>
-              <a:t>start with 0 , Second 1</a:t>
-            </a:r>
-            <a:endParaRPr lang="en-IN" altLang="en-US"/>
-          </a:p>
-          <a:p>
-            <a:endParaRPr lang="en-IN" altLang="en-US"/>
+            <a:endParaRPr lang="en-US"/>
+          </a:p>
+          <a:p>
+            <a:r>
+              <a:rPr lang="en-US"/>
+              <a:t>arr = np.array([1, 2, 3, 4], ndmin=6)</a:t>
+            </a:r>
+            <a:endParaRPr lang="en-US"/>
+          </a:p>
+          <a:p>
+            <a:endParaRPr lang="en-US"/>
+          </a:p>
+          <a:p>
+            <a:r>
+              <a:rPr lang="en-US"/>
+              <a:t>print(arr)</a:t>
+            </a:r>
+            <a:endParaRPr lang="en-US"/>
+          </a:p>
+          <a:p>
+            <a:r>
+              <a:rPr lang="en-US"/>
+              <a:t>print('number of dimensions :', arr.ndim)</a:t>
+            </a:r>
+            <a:endParaRPr lang="en-US"/>
           </a:p>
         </p:txBody>
       </p:sp>
@@ -5006,51 +5095,45 @@
           <a:p>
             <a:r>
               <a:rPr lang="en-US"/>
-              <a:t>Slicing arrays</a:t>
+              <a:t>NumPy - Indexing, Accessing Array Elemen</a:t>
+            </a:r>
+            <a:r>
+              <a:rPr lang="en-IN" altLang="en-US"/>
+              <a:t>t</a:t>
+            </a:r>
+            <a:endParaRPr lang="en-IN" altLang="en-US"/>
+          </a:p>
+        </p:txBody>
+      </p:sp>
+      <p:sp>
+        <p:nvSpPr>
+          <p:cNvPr id="3" name="Content Placeholder 2"/>
+          <p:cNvSpPr>
+            <a:spLocks noGrp="1"/>
+          </p:cNvSpPr>
+          <p:nvPr>
+            <p:ph idx="1"/>
+          </p:nvPr>
+        </p:nvSpPr>
+        <p:spPr/>
+        <p:txBody>
+          <a:bodyPr/>
+          <a:p>
+            <a:r>
+              <a:rPr lang="en-US"/>
+              <a:t>Array indexing is the same as accessing an array element.</a:t>
             </a:r>
             <a:endParaRPr lang="en-US"/>
           </a:p>
-        </p:txBody>
-      </p:sp>
-      <p:sp>
-        <p:nvSpPr>
-          <p:cNvPr id="3" name="Content Placeholder 2"/>
-          <p:cNvSpPr>
-            <a:spLocks noGrp="1"/>
-          </p:cNvSpPr>
-          <p:nvPr>
-            <p:ph idx="1"/>
-          </p:nvPr>
-        </p:nvSpPr>
-        <p:spPr/>
-        <p:txBody>
-          <a:bodyPr/>
-          <a:p>
-            <a:r>
-              <a:rPr lang="en-US"/>
-              <a:t>Slicing in python means taking elements from one given index to another given index.</a:t>
-            </a:r>
-            <a:endParaRPr lang="en-US"/>
-          </a:p>
-          <a:p>
-            <a:endParaRPr lang="en-US"/>
-          </a:p>
-          <a:p>
-            <a:r>
-              <a:rPr lang="en-US"/>
-              <a:t>We pass slice instead of index like this: [start:end].</a:t>
-            </a:r>
-            <a:endParaRPr lang="en-US"/>
-          </a:p>
-          <a:p>
-            <a:endParaRPr lang="en-US"/>
-          </a:p>
-          <a:p>
-            <a:r>
-              <a:rPr lang="en-US"/>
-              <a:t>We can also define the step, like this: [start:end:step].</a:t>
-            </a:r>
-            <a:endParaRPr lang="en-US"/>
+          <a:p>
+            <a:r>
+              <a:rPr lang="en-IN" altLang="en-US"/>
+              <a:t>start with 0 , Second 1</a:t>
+            </a:r>
+            <a:endParaRPr lang="en-IN" altLang="en-US"/>
+          </a:p>
+          <a:p>
+            <a:endParaRPr lang="en-IN" altLang="en-US"/>
           </a:p>
         </p:txBody>
       </p:sp>
@@ -5088,7 +5171,7 @@
           <a:p>
             <a:r>
               <a:rPr lang="en-US"/>
-              <a:t>NumPy Data Types</a:t>
+              <a:t>Slicing arrays</a:t>
             </a:r>
             <a:endParaRPr lang="en-US"/>
           </a:p>
@@ -5110,84 +5193,29 @@
           <a:p>
             <a:r>
               <a:rPr lang="en-US"/>
-              <a:t>Data Types in Python</a:t>
+              <a:t>Slicing in python means taking elements from one given index to another given index.</a:t>
             </a:r>
             <a:endParaRPr lang="en-US"/>
           </a:p>
           <a:p>
-            <a:r>
-              <a:rPr lang="en-US" sz="2000" b="1">
-                <a:solidFill>
-                  <a:srgbClr val="FF0000"/>
-                </a:solidFill>
-              </a:rPr>
-              <a:t>strings - used to represent text data, the text is given under quote marks. e.g. "ABCD"</a:t>
-            </a:r>
-            <a:endParaRPr lang="en-US" sz="2000" b="1">
-              <a:solidFill>
-                <a:srgbClr val="FF0000"/>
-              </a:solidFill>
-            </a:endParaRPr>
-          </a:p>
-          <a:p>
-            <a:r>
-              <a:rPr lang="en-US" sz="2000" b="1">
-                <a:solidFill>
-                  <a:srgbClr val="FF0000"/>
-                </a:solidFill>
-              </a:rPr>
-              <a:t>integer - used to represent integer numbers. e.g. -1, -2, -3</a:t>
-            </a:r>
-            <a:endParaRPr lang="en-US" sz="2000" b="1">
-              <a:solidFill>
-                <a:srgbClr val="FF0000"/>
-              </a:solidFill>
-            </a:endParaRPr>
-          </a:p>
-          <a:p>
-            <a:r>
-              <a:rPr lang="en-US" sz="2000" b="1">
-                <a:solidFill>
-                  <a:srgbClr val="FF0000"/>
-                </a:solidFill>
-              </a:rPr>
-              <a:t>float - used to represent real numbers. e.g. 1.2, 42.42</a:t>
-            </a:r>
-            <a:endParaRPr lang="en-US" sz="2000" b="1">
-              <a:solidFill>
-                <a:srgbClr val="FF0000"/>
-              </a:solidFill>
-            </a:endParaRPr>
-          </a:p>
-          <a:p>
-            <a:r>
-              <a:rPr lang="en-US" sz="2000" b="1">
-                <a:solidFill>
-                  <a:srgbClr val="FF0000"/>
-                </a:solidFill>
-              </a:rPr>
-              <a:t>boolean - used to represent True or False.</a:t>
-            </a:r>
-            <a:endParaRPr lang="en-US" sz="2000" b="1">
-              <a:solidFill>
-                <a:srgbClr val="FF0000"/>
-              </a:solidFill>
-            </a:endParaRPr>
-          </a:p>
-          <a:p>
-            <a:r>
-              <a:rPr lang="en-US" sz="2000" b="1">
-                <a:solidFill>
-                  <a:srgbClr val="FF0000"/>
-                </a:solidFill>
-              </a:rPr>
-              <a:t>complex - used to represent complex numbers. e.g. 1.0 + 2.0j, 1.5 + 2.5j</a:t>
-            </a:r>
-            <a:endParaRPr lang="en-US" sz="2000" b="1">
-              <a:solidFill>
-                <a:srgbClr val="FF0000"/>
-              </a:solidFill>
-            </a:endParaRPr>
+            <a:endParaRPr lang="en-US"/>
+          </a:p>
+          <a:p>
+            <a:r>
+              <a:rPr lang="en-US"/>
+              <a:t>We pass slice instead of index like this: [start:end].</a:t>
+            </a:r>
+            <a:endParaRPr lang="en-US"/>
+          </a:p>
+          <a:p>
+            <a:endParaRPr lang="en-US"/>
+          </a:p>
+          <a:p>
+            <a:r>
+              <a:rPr lang="en-US"/>
+              <a:t>We can also define the step, like this: [start:end:step].</a:t>
+            </a:r>
+            <a:endParaRPr lang="en-US"/>
           </a:p>
         </p:txBody>
       </p:sp>
@@ -5225,7 +5253,7 @@
           <a:p>
             <a:r>
               <a:rPr lang="en-US"/>
-              <a:t>Data Types in NumPy</a:t>
+              <a:t>NumPy Data Types</a:t>
             </a:r>
             <a:endParaRPr lang="en-US"/>
           </a:p>
@@ -5246,80 +5274,85 @@
           <a:bodyPr/>
           <a:p>
             <a:r>
-              <a:rPr lang="en-US" sz="2000"/>
-              <a:t>i - integer</a:t>
-            </a:r>
-            <a:endParaRPr lang="en-US" sz="2000"/>
-          </a:p>
-          <a:p>
-            <a:r>
-              <a:rPr lang="en-US" sz="2000"/>
-              <a:t>b - boolean</a:t>
-            </a:r>
-            <a:endParaRPr lang="en-US" sz="2000"/>
-          </a:p>
-          <a:p>
-            <a:r>
-              <a:rPr lang="en-US" sz="2000"/>
-              <a:t>u - unsigned integer</a:t>
-            </a:r>
-            <a:endParaRPr lang="en-US" sz="2000"/>
-          </a:p>
-          <a:p>
-            <a:r>
-              <a:rPr lang="en-US" sz="2000"/>
-              <a:t>f - float</a:t>
-            </a:r>
-            <a:endParaRPr lang="en-US" sz="2000"/>
-          </a:p>
-          <a:p>
-            <a:r>
-              <a:rPr lang="en-US" sz="2000"/>
-              <a:t>c - complex float</a:t>
-            </a:r>
-            <a:endParaRPr lang="en-US" sz="2000"/>
-          </a:p>
-          <a:p>
-            <a:r>
-              <a:rPr lang="en-US" sz="2000"/>
-              <a:t>m - timedelta</a:t>
-            </a:r>
-            <a:endParaRPr lang="en-US" sz="2000"/>
-          </a:p>
-          <a:p>
-            <a:r>
-              <a:rPr lang="en-US" sz="2000"/>
-              <a:t>M - datetime</a:t>
-            </a:r>
-            <a:endParaRPr lang="en-US" sz="2000"/>
-          </a:p>
-          <a:p>
-            <a:r>
-              <a:rPr lang="en-US" sz="2000"/>
-              <a:t>O - object</a:t>
-            </a:r>
-            <a:endParaRPr lang="en-US" sz="2000"/>
-          </a:p>
-          <a:p>
-            <a:r>
-              <a:rPr lang="en-US" sz="2000"/>
-              <a:t>S - string</a:t>
-            </a:r>
-            <a:endParaRPr lang="en-US" sz="2000"/>
-          </a:p>
-          <a:p>
-            <a:r>
-              <a:rPr lang="en-US" sz="2000"/>
-              <a:t>U - unicode string</a:t>
-            </a:r>
-            <a:endParaRPr lang="en-US" sz="2000"/>
-          </a:p>
-          <a:p>
-            <a:r>
-              <a:rPr lang="en-US" sz="2000"/>
-              <a:t>V - fixed chunk of memory for other type ( void )</a:t>
-            </a:r>
-            <a:endParaRPr lang="en-US" sz="2000"/>
+              <a:rPr lang="en-US"/>
+              <a:t>Data Types in Python</a:t>
+            </a:r>
+            <a:endParaRPr lang="en-US"/>
+          </a:p>
+          <a:p>
+            <a:r>
+              <a:rPr lang="en-US" sz="2000" b="1">
+                <a:solidFill>
+                  <a:srgbClr val="FF0000"/>
+                </a:solidFill>
+              </a:rPr>
+              <a:t>strings - used to represent text data, the text is given under quote marks. e.g. "ABCD"</a:t>
+            </a:r>
+            <a:endParaRPr lang="en-US" sz="2000" b="1">
+              <a:solidFill>
+                <a:srgbClr val="FF0000"/>
+              </a:solidFill>
+            </a:endParaRPr>
+          </a:p>
+          <a:p>
+            <a:r>
+              <a:rPr lang="en-US" sz="2000" b="1">
+                <a:solidFill>
+                  <a:srgbClr val="FF0000"/>
+                </a:solidFill>
+              </a:rPr>
+              <a:t>integer - used to represent integer numbers. e.g. -1, -2, -3</a:t>
+            </a:r>
+            <a:endParaRPr lang="en-US" sz="2000" b="1">
+              <a:solidFill>
+                <a:srgbClr val="FF0000"/>
+              </a:solidFill>
+            </a:endParaRPr>
+          </a:p>
+          <a:p>
+            <a:r>
+              <a:rPr lang="en-US" sz="2000" b="1">
+                <a:solidFill>
+                  <a:srgbClr val="FF0000"/>
+                </a:solidFill>
+              </a:rPr>
+              <a:t>float - used to represent real numbers. e.g. 1.2, 42.42</a:t>
+            </a:r>
+            <a:endParaRPr lang="en-US" sz="2000" b="1">
+              <a:solidFill>
+                <a:srgbClr val="FF0000"/>
+              </a:solidFill>
+            </a:endParaRPr>
+          </a:p>
+          <a:p>
+            <a:r>
+              <a:rPr lang="en-US" sz="2000" b="1">
+                <a:solidFill>
+                  <a:srgbClr val="FF0000"/>
+                </a:solidFill>
+              </a:rPr>
+              <a:t>boolean - used to represent True or False.</a:t>
+            </a:r>
+            <a:endParaRPr lang="en-US" sz="2000" b="1">
+              <a:solidFill>
+                <a:srgbClr val="FF0000"/>
+              </a:solidFill>
+            </a:endParaRPr>
+          </a:p>
+          <a:p>
+            <a:r>
+              <a:rPr lang="en-US" sz="2000" b="1">
+                <a:solidFill>
+                  <a:srgbClr val="FF0000"/>
+                </a:solidFill>
+              </a:rPr>
+              <a:t>complex - used to represent complex numbers. e.g. 1.0 + 2.0j, 1.5 + 2.5j</a:t>
+            </a:r>
+            <a:endParaRPr lang="en-US" sz="2000" b="1">
+              <a:solidFill>
+                <a:srgbClr val="FF0000"/>
+              </a:solidFill>
+            </a:endParaRPr>
           </a:p>
         </p:txBody>
       </p:sp>
@@ -5357,6 +5390,138 @@
           <a:p>
             <a:r>
               <a:rPr lang="en-US"/>
+              <a:t>Data Types in NumPy</a:t>
+            </a:r>
+            <a:endParaRPr lang="en-US"/>
+          </a:p>
+        </p:txBody>
+      </p:sp>
+      <p:sp>
+        <p:nvSpPr>
+          <p:cNvPr id="3" name="Content Placeholder 2"/>
+          <p:cNvSpPr>
+            <a:spLocks noGrp="1"/>
+          </p:cNvSpPr>
+          <p:nvPr>
+            <p:ph idx="1"/>
+          </p:nvPr>
+        </p:nvSpPr>
+        <p:spPr/>
+        <p:txBody>
+          <a:bodyPr/>
+          <a:p>
+            <a:r>
+              <a:rPr lang="en-US" sz="2000"/>
+              <a:t>i - integer</a:t>
+            </a:r>
+            <a:endParaRPr lang="en-US" sz="2000"/>
+          </a:p>
+          <a:p>
+            <a:r>
+              <a:rPr lang="en-US" sz="2000"/>
+              <a:t>b - boolean</a:t>
+            </a:r>
+            <a:endParaRPr lang="en-US" sz="2000"/>
+          </a:p>
+          <a:p>
+            <a:r>
+              <a:rPr lang="en-US" sz="2000"/>
+              <a:t>u - unsigned integer</a:t>
+            </a:r>
+            <a:endParaRPr lang="en-US" sz="2000"/>
+          </a:p>
+          <a:p>
+            <a:r>
+              <a:rPr lang="en-US" sz="2000"/>
+              <a:t>f - float</a:t>
+            </a:r>
+            <a:endParaRPr lang="en-US" sz="2000"/>
+          </a:p>
+          <a:p>
+            <a:r>
+              <a:rPr lang="en-US" sz="2000"/>
+              <a:t>c - complex float</a:t>
+            </a:r>
+            <a:endParaRPr lang="en-US" sz="2000"/>
+          </a:p>
+          <a:p>
+            <a:r>
+              <a:rPr lang="en-US" sz="2000"/>
+              <a:t>m - timedelta</a:t>
+            </a:r>
+            <a:endParaRPr lang="en-US" sz="2000"/>
+          </a:p>
+          <a:p>
+            <a:r>
+              <a:rPr lang="en-US" sz="2000"/>
+              <a:t>M - datetime</a:t>
+            </a:r>
+            <a:endParaRPr lang="en-US" sz="2000"/>
+          </a:p>
+          <a:p>
+            <a:r>
+              <a:rPr lang="en-US" sz="2000"/>
+              <a:t>O - object</a:t>
+            </a:r>
+            <a:endParaRPr lang="en-US" sz="2000"/>
+          </a:p>
+          <a:p>
+            <a:r>
+              <a:rPr lang="en-US" sz="2000"/>
+              <a:t>S - string</a:t>
+            </a:r>
+            <a:endParaRPr lang="en-US" sz="2000"/>
+          </a:p>
+          <a:p>
+            <a:r>
+              <a:rPr lang="en-US" sz="2000"/>
+              <a:t>U - unicode string</a:t>
+            </a:r>
+            <a:endParaRPr lang="en-US" sz="2000"/>
+          </a:p>
+          <a:p>
+            <a:r>
+              <a:rPr lang="en-US" sz="2000"/>
+              <a:t>V - fixed chunk of memory for other type ( void )</a:t>
+            </a:r>
+            <a:endParaRPr lang="en-US" sz="2000"/>
+          </a:p>
+        </p:txBody>
+      </p:sp>
+    </p:spTree>
+  </p:cSld>
+  <p:clrMapOvr>
+    <a:masterClrMapping/>
+  </p:clrMapOvr>
+</p:sld>
+</file>
+
+<file path=ppt/slides/slide18.xml><?xml version="1.0" encoding="utf-8"?>
+<p:sld xmlns:a="http://schemas.openxmlformats.org/drawingml/2006/main" xmlns:r="http://schemas.openxmlformats.org/officeDocument/2006/relationships" xmlns:p="http://schemas.openxmlformats.org/presentationml/2006/main">
+  <p:cSld>
+    <p:spTree>
+      <p:nvGrpSpPr>
+        <p:cNvPr id="1" name=""/>
+        <p:cNvGrpSpPr/>
+        <p:nvPr/>
+      </p:nvGrpSpPr>
+      <p:grpSpPr/>
+      <p:sp>
+        <p:nvSpPr>
+          <p:cNvPr id="2" name="Title 1"/>
+          <p:cNvSpPr>
+            <a:spLocks noGrp="1"/>
+          </p:cNvSpPr>
+          <p:nvPr>
+            <p:ph type="title"/>
+          </p:nvPr>
+        </p:nvSpPr>
+        <p:spPr/>
+        <p:txBody>
+          <a:bodyPr/>
+          <a:p>
+            <a:r>
+              <a:rPr lang="en-US"/>
               <a:t>NumPy Array Copy vs View</a:t>
             </a:r>
             <a:endParaRPr lang="en-US"/>
@@ -5385,6 +5550,116 @@
           </a:p>
         </p:txBody>
       </p:sp>
+      <p:pic>
+        <p:nvPicPr>
+          <p:cNvPr id="4" name="Picture 3"/>
+          <p:cNvPicPr>
+            <a:picLocks noChangeAspect="1"/>
+          </p:cNvPicPr>
+          <p:nvPr/>
+        </p:nvPicPr>
+        <p:blipFill>
+          <a:blip r:embed="rId1"/>
+          <a:stretch>
+            <a:fillRect/>
+          </a:stretch>
+        </p:blipFill>
+        <p:spPr>
+          <a:xfrm>
+            <a:off x="5852795" y="3071495"/>
+            <a:ext cx="3139440" cy="4617085"/>
+          </a:xfrm>
+          <a:prstGeom prst="rect">
+            <a:avLst/>
+          </a:prstGeom>
+        </p:spPr>
+      </p:pic>
+      <p:pic>
+        <p:nvPicPr>
+          <p:cNvPr id="6" name="Picture 5"/>
+          <p:cNvPicPr>
+            <a:picLocks noChangeAspect="1"/>
+          </p:cNvPicPr>
+          <p:nvPr/>
+        </p:nvPicPr>
+        <p:blipFill>
+          <a:blip r:embed="rId2"/>
+          <a:stretch>
+            <a:fillRect/>
+          </a:stretch>
+        </p:blipFill>
+        <p:spPr>
+          <a:xfrm>
+            <a:off x="3857625" y="2036445"/>
+            <a:ext cx="4476750" cy="2545080"/>
+          </a:xfrm>
+          <a:prstGeom prst="rect">
+            <a:avLst/>
+          </a:prstGeom>
+        </p:spPr>
+      </p:pic>
+    </p:spTree>
+  </p:cSld>
+  <p:clrMapOvr>
+    <a:masterClrMapping/>
+  </p:clrMapOvr>
+</p:sld>
+</file>
+
+<file path=ppt/slides/slide19.xml><?xml version="1.0" encoding="utf-8"?>
+<p:sld xmlns:a="http://schemas.openxmlformats.org/drawingml/2006/main" xmlns:r="http://schemas.openxmlformats.org/officeDocument/2006/relationships" xmlns:p="http://schemas.openxmlformats.org/presentationml/2006/main">
+  <p:cSld>
+    <p:spTree>
+      <p:nvGrpSpPr>
+        <p:cNvPr id="1" name=""/>
+        <p:cNvGrpSpPr/>
+        <p:nvPr/>
+      </p:nvGrpSpPr>
+      <p:grpSpPr/>
+      <p:sp>
+        <p:nvSpPr>
+          <p:cNvPr id="2" name="Title 1"/>
+          <p:cNvSpPr>
+            <a:spLocks noGrp="1"/>
+          </p:cNvSpPr>
+          <p:nvPr>
+            <p:ph type="title"/>
+          </p:nvPr>
+        </p:nvSpPr>
+        <p:spPr/>
+        <p:txBody>
+          <a:bodyPr/>
+          <a:p>
+            <a:endParaRPr lang="en-US"/>
+          </a:p>
+        </p:txBody>
+      </p:sp>
+      <p:pic>
+        <p:nvPicPr>
+          <p:cNvPr id="4" name="Content Placeholder 3"/>
+          <p:cNvPicPr>
+            <a:picLocks noChangeAspect="1"/>
+          </p:cNvPicPr>
+          <p:nvPr>
+            <p:ph idx="1"/>
+          </p:nvPr>
+        </p:nvPicPr>
+        <p:blipFill>
+          <a:blip r:embed="rId1"/>
+          <a:stretch>
+            <a:fillRect/>
+          </a:stretch>
+        </p:blipFill>
+        <p:spPr>
+          <a:xfrm>
+            <a:off x="609600" y="1349375"/>
+            <a:ext cx="11252835" cy="4159250"/>
+          </a:xfrm>
+          <a:prstGeom prst="rect">
+            <a:avLst/>
+          </a:prstGeom>
+        </p:spPr>
+      </p:pic>
     </p:spTree>
   </p:cSld>
   <p:clrMapOvr>
@@ -5746,6 +6021,132 @@
 </p:sld>
 </file>
 
+<file path=ppt/slides/slide20.xml><?xml version="1.0" encoding="utf-8"?>
+<p:sld xmlns:a="http://schemas.openxmlformats.org/drawingml/2006/main" xmlns:r="http://schemas.openxmlformats.org/officeDocument/2006/relationships" xmlns:p="http://schemas.openxmlformats.org/presentationml/2006/main">
+  <p:cSld>
+    <p:spTree>
+      <p:nvGrpSpPr>
+        <p:cNvPr id="1" name=""/>
+        <p:cNvGrpSpPr/>
+        <p:nvPr/>
+      </p:nvGrpSpPr>
+      <p:grpSpPr/>
+      <p:sp>
+        <p:nvSpPr>
+          <p:cNvPr id="2" name="Title 1"/>
+          <p:cNvSpPr>
+            <a:spLocks noGrp="1"/>
+          </p:cNvSpPr>
+          <p:nvPr>
+            <p:ph type="title"/>
+          </p:nvPr>
+        </p:nvSpPr>
+        <p:spPr/>
+        <p:txBody>
+          <a:bodyPr/>
+          <a:p>
+            <a:endParaRPr lang="en-US"/>
+          </a:p>
+        </p:txBody>
+      </p:sp>
+      <p:sp>
+        <p:nvSpPr>
+          <p:cNvPr id="3" name="Content Placeholder 2"/>
+          <p:cNvSpPr>
+            <a:spLocks noGrp="1"/>
+          </p:cNvSpPr>
+          <p:nvPr>
+            <p:ph idx="1"/>
+          </p:nvPr>
+        </p:nvSpPr>
+        <p:spPr/>
+        <p:txBody>
+          <a:bodyPr/>
+          <a:p>
+            <a:r>
+              <a:rPr lang="en-US"/>
+              <a:t>write A program to extract  ODD index value  from an array[ ] in array A [ ]  without decimal place and extract even index value from an array [ ] in array B [ ] without decimal place and sum of two  array elements and saves sum in third array result [ ]. then print the  third array result []. javascript</a:t>
+            </a:r>
+            <a:endParaRPr lang="en-US"/>
+          </a:p>
+        </p:txBody>
+      </p:sp>
+    </p:spTree>
+  </p:cSld>
+  <p:clrMapOvr>
+    <a:masterClrMapping/>
+  </p:clrMapOvr>
+</p:sld>
+</file>
+
+<file path=ppt/slides/slide21.xml><?xml version="1.0" encoding="utf-8"?>
+<p:sld xmlns:a="http://schemas.openxmlformats.org/drawingml/2006/main" xmlns:r="http://schemas.openxmlformats.org/officeDocument/2006/relationships" xmlns:p="http://schemas.openxmlformats.org/presentationml/2006/main">
+  <p:cSld>
+    <p:spTree>
+      <p:nvGrpSpPr>
+        <p:cNvPr id="1" name=""/>
+        <p:cNvGrpSpPr/>
+        <p:nvPr/>
+      </p:nvGrpSpPr>
+      <p:grpSpPr/>
+      <p:sp>
+        <p:nvSpPr>
+          <p:cNvPr id="2" name="Title 1"/>
+          <p:cNvSpPr>
+            <a:spLocks noGrp="1"/>
+          </p:cNvSpPr>
+          <p:nvPr>
+            <p:ph type="title"/>
+          </p:nvPr>
+        </p:nvSpPr>
+        <p:spPr/>
+        <p:txBody>
+          <a:bodyPr/>
+          <a:p>
+            <a:endParaRPr lang="en-US"/>
+          </a:p>
+        </p:txBody>
+      </p:sp>
+      <p:sp>
+        <p:nvSpPr>
+          <p:cNvPr id="3" name="Content Placeholder 2"/>
+          <p:cNvSpPr>
+            <a:spLocks noGrp="1"/>
+          </p:cNvSpPr>
+          <p:nvPr>
+            <p:ph idx="1"/>
+          </p:nvPr>
+        </p:nvSpPr>
+        <p:spPr/>
+        <p:txBody>
+          <a:bodyPr/>
+          <a:p>
+            <a:r>
+              <a:rPr lang="en-US"/>
+              <a:t>write a function to find the first and second largest element in an array and substract 1 from then and if there is duplicate value found also remove that and return mutiplication of resulting elements .javascript</a:t>
+            </a:r>
+            <a:endParaRPr lang="en-US"/>
+          </a:p>
+          <a:p>
+            <a:endParaRPr lang="en-US"/>
+          </a:p>
+          <a:p>
+            <a:r>
+              <a:rPr lang="en-US"/>
+              <a:t>write a function to input an integer n and print the sum of all its even digits and all its odd digits separately. then given integer is  "23587"even digits are 2 &amp; 8 and their sum is 10, adn odd digits are 3,5,&amp; 7 and their sum is 15. and multiply the resultant  value 10x15=150 and check this number is prime or  not</a:t>
+            </a:r>
+            <a:endParaRPr lang="en-US"/>
+          </a:p>
+        </p:txBody>
+      </p:sp>
+    </p:spTree>
+  </p:cSld>
+  <p:clrMapOvr>
+    <a:masterClrMapping/>
+  </p:clrMapOvr>
+</p:sld>
+</file>
+
 <file path=ppt/slides/slide3.xml><?xml version="1.0" encoding="utf-8"?>
 <p:sld xmlns:a="http://schemas.openxmlformats.org/drawingml/2006/main" xmlns:r="http://schemas.openxmlformats.org/officeDocument/2006/relationships" xmlns:p="http://schemas.openxmlformats.org/presentationml/2006/main">
   <p:cSld>
@@ -5771,10 +6172,10 @@
           <a:bodyPr/>
           <a:p>
             <a:r>
-              <a:rPr lang="en-IN" altLang="en-US"/>
-              <a:t>Numpy</a:t>
-            </a:r>
-            <a:endParaRPr lang="en-IN" altLang="en-US"/>
+              <a:rPr lang="en-US"/>
+              <a:t>Numpy Array Vs Python List </a:t>
+            </a:r>
+            <a:endParaRPr lang="en-US"/>
           </a:p>
         </p:txBody>
       </p:sp>
@@ -5792,165 +6193,38 @@
         <p:txBody>
           <a:bodyPr/>
           <a:p>
-            <a:pPr marL="0" indent="0">
-              <a:buNone/>
-            </a:pPr>
-            <a:r>
-              <a:rPr lang="en-IN" altLang="en-US" sz="1800" b="1">
-                <a:solidFill>
-                  <a:schemeClr val="accent2"/>
-                </a:solidFill>
-              </a:rPr>
-              <a:t>. NumPy is often callend as an alternate for </a:t>
-            </a:r>
-            <a:r>
-              <a:rPr lang="en-IN" altLang="en-US" sz="1800" b="1">
-                <a:solidFill>
-                  <a:srgbClr val="FF0000"/>
-                </a:solidFill>
-              </a:rPr>
-              <a:t>MatLab</a:t>
-            </a:r>
-            <a:r>
-              <a:rPr lang="en-IN" altLang="en-US" sz="1800" b="1">
-                <a:solidFill>
-                  <a:schemeClr val="accent2"/>
-                </a:solidFill>
-              </a:rPr>
-              <a:t> (a programming platform designed specifically for engineers and scientists for Data Analysis, Developing Algorithms, Create Models and applications etc).</a:t>
-            </a:r>
-            <a:endParaRPr lang="en-IN" altLang="en-US" sz="1800" b="1">
-              <a:solidFill>
-                <a:schemeClr val="accent2"/>
-              </a:solidFill>
-            </a:endParaRPr>
-          </a:p>
-          <a:p>
-            <a:pPr marL="0" indent="0">
-              <a:buNone/>
-            </a:pPr>
-            <a:endParaRPr lang="en-IN" altLang="en-US" sz="1800" b="1">
-              <a:solidFill>
-                <a:schemeClr val="accent2"/>
-              </a:solidFill>
-            </a:endParaRPr>
-          </a:p>
-          <a:p>
-            <a:pPr marL="0" indent="0">
-              <a:buNone/>
-            </a:pPr>
-            <a:r>
-              <a:rPr lang="en-IN" altLang="en-US" sz="1800" b="1">
-                <a:solidFill>
-                  <a:schemeClr val="accent2"/>
-                </a:solidFill>
-              </a:rPr>
-              <a:t>. Numpy is used with packages link </a:t>
-            </a:r>
-            <a:r>
-              <a:rPr lang="en-IN" altLang="en-US" sz="1800" b="1">
-                <a:solidFill>
-                  <a:srgbClr val="FF0000"/>
-                </a:solidFill>
-              </a:rPr>
-              <a:t>Scipy(Scientific python)</a:t>
-            </a:r>
-            <a:r>
-              <a:rPr lang="en-IN" altLang="en-US" sz="1800" b="1">
-                <a:solidFill>
-                  <a:schemeClr val="accent2"/>
-                </a:solidFill>
-              </a:rPr>
-              <a:t> and </a:t>
-            </a:r>
-            <a:r>
-              <a:rPr lang="en-IN" altLang="en-US" sz="1800" b="1">
-                <a:solidFill>
-                  <a:srgbClr val="FF0000"/>
-                </a:solidFill>
-              </a:rPr>
-              <a:t>Mat-Plotlib (Plotting Library)</a:t>
-            </a:r>
-            <a:r>
-              <a:rPr lang="en-IN" altLang="en-US" sz="1800" b="1">
-                <a:solidFill>
-                  <a:schemeClr val="accent2"/>
-                </a:solidFill>
-              </a:rPr>
-              <a:t> and this makes it capable to replace MatLab.</a:t>
-            </a:r>
-            <a:endParaRPr lang="en-IN" altLang="en-US" sz="1800" b="1">
-              <a:solidFill>
-                <a:schemeClr val="accent2"/>
-              </a:solidFill>
-            </a:endParaRPr>
-          </a:p>
-          <a:p>
-            <a:pPr marL="0" indent="0">
-              <a:buNone/>
-            </a:pPr>
-            <a:endParaRPr lang="en-IN" altLang="en-US" sz="1800" b="1">
-              <a:solidFill>
-                <a:schemeClr val="accent2"/>
-              </a:solidFill>
-            </a:endParaRPr>
-          </a:p>
-          <a:p>
-            <a:pPr marL="0" indent="0">
-              <a:buNone/>
-            </a:pPr>
-            <a:r>
-              <a:rPr lang="en-IN" altLang="en-US" sz="2400" b="1">
-                <a:solidFill>
-                  <a:schemeClr val="accent2"/>
-                </a:solidFill>
-              </a:rPr>
-              <a:t>1.  1 Dimensional Array id referred to as Vector.</a:t>
-            </a:r>
-            <a:endParaRPr lang="en-IN" altLang="en-US" sz="2400" b="1">
-              <a:solidFill>
-                <a:schemeClr val="accent2"/>
-              </a:solidFill>
-            </a:endParaRPr>
-          </a:p>
-          <a:p>
-            <a:pPr marL="0" indent="0">
-              <a:buNone/>
-            </a:pPr>
-            <a:r>
-              <a:rPr lang="en-IN" altLang="en-US" sz="2400" b="1">
-                <a:solidFill>
-                  <a:schemeClr val="accent2"/>
-                </a:solidFill>
-              </a:rPr>
-              <a:t>2.  2 Dimensional Array is referred to as Matrix.</a:t>
-            </a:r>
-            <a:endParaRPr lang="en-IN" altLang="en-US" sz="2400" b="1">
-              <a:solidFill>
-                <a:schemeClr val="accent2"/>
-              </a:solidFill>
-            </a:endParaRPr>
-          </a:p>
-          <a:p>
-            <a:pPr marL="0" indent="0">
-              <a:buNone/>
-            </a:pPr>
-            <a:r>
-              <a:rPr lang="en-IN" altLang="en-US" sz="2400" b="1">
-                <a:solidFill>
-                  <a:schemeClr val="accent2"/>
-                </a:solidFill>
-              </a:rPr>
-              <a:t>3.  3 Dimensional Array is referred to as Tensor</a:t>
-            </a:r>
-            <a:endParaRPr lang="en-IN" altLang="en-US" sz="2400" b="1">
-              <a:solidFill>
-                <a:schemeClr val="accent2"/>
-              </a:solidFill>
-            </a:endParaRPr>
-          </a:p>
-        </p:txBody>
-      </p:sp>
+            <a:r>
+              <a:rPr lang="en-US"/>
+              <a:t>Numpy Array Vs Python List </a:t>
+            </a:r>
+            <a:endParaRPr lang="en-US"/>
+          </a:p>
+        </p:txBody>
+      </p:sp>
+      <p:pic>
+        <p:nvPicPr>
+          <p:cNvPr id="4" name="Picture 3"/>
+          <p:cNvPicPr>
+            <a:picLocks noChangeAspect="1"/>
+          </p:cNvPicPr>
+          <p:nvPr/>
+        </p:nvPicPr>
+        <p:blipFill>
+          <a:blip r:embed="rId1"/>
+          <a:stretch>
+            <a:fillRect/>
+          </a:stretch>
+        </p:blipFill>
+        <p:spPr>
+          <a:xfrm>
+            <a:off x="609600" y="1569720"/>
+            <a:ext cx="10290175" cy="5172710"/>
+          </a:xfrm>
+          <a:prstGeom prst="rect">
+            <a:avLst/>
+          </a:prstGeom>
+        </p:spPr>
+      </p:pic>
     </p:spTree>
   </p:cSld>
   <p:clrMapOvr>
@@ -5960,6 +6234,219 @@
 </file>
 
 <file path=ppt/slides/slide4.xml><?xml version="1.0" encoding="utf-8"?>
+<p:sld xmlns:a="http://schemas.openxmlformats.org/drawingml/2006/main" xmlns:r="http://schemas.openxmlformats.org/officeDocument/2006/relationships" xmlns:p="http://schemas.openxmlformats.org/presentationml/2006/main">
+  <p:cSld>
+    <p:spTree>
+      <p:nvGrpSpPr>
+        <p:cNvPr id="1" name=""/>
+        <p:cNvGrpSpPr/>
+        <p:nvPr/>
+      </p:nvGrpSpPr>
+      <p:grpSpPr/>
+      <p:sp>
+        <p:nvSpPr>
+          <p:cNvPr id="2" name="Title 1"/>
+          <p:cNvSpPr>
+            <a:spLocks noGrp="1"/>
+          </p:cNvSpPr>
+          <p:nvPr>
+            <p:ph type="title"/>
+          </p:nvPr>
+        </p:nvSpPr>
+        <p:spPr/>
+        <p:txBody>
+          <a:bodyPr/>
+          <a:p>
+            <a:r>
+              <a:rPr lang="en-IN" altLang="en-US"/>
+              <a:t>Numpy</a:t>
+            </a:r>
+            <a:endParaRPr lang="en-IN" altLang="en-US"/>
+          </a:p>
+        </p:txBody>
+      </p:sp>
+      <p:sp>
+        <p:nvSpPr>
+          <p:cNvPr id="3" name="Content Placeholder 2"/>
+          <p:cNvSpPr>
+            <a:spLocks noGrp="1"/>
+          </p:cNvSpPr>
+          <p:nvPr>
+            <p:ph idx="1"/>
+          </p:nvPr>
+        </p:nvSpPr>
+        <p:spPr/>
+        <p:txBody>
+          <a:bodyPr/>
+          <a:p>
+            <a:pPr marL="0" indent="0">
+              <a:buNone/>
+            </a:pPr>
+            <a:r>
+              <a:rPr lang="en-IN" altLang="en-US" sz="1800" b="1">
+                <a:solidFill>
+                  <a:schemeClr val="accent2"/>
+                </a:solidFill>
+              </a:rPr>
+              <a:t>. NumPy is often callend as an alternate for </a:t>
+            </a:r>
+            <a:r>
+              <a:rPr lang="en-IN" altLang="en-US" sz="1800" b="1">
+                <a:solidFill>
+                  <a:srgbClr val="FF0000"/>
+                </a:solidFill>
+              </a:rPr>
+              <a:t>MatLab</a:t>
+            </a:r>
+            <a:r>
+              <a:rPr lang="en-IN" altLang="en-US" sz="1800" b="1">
+                <a:solidFill>
+                  <a:schemeClr val="accent2"/>
+                </a:solidFill>
+              </a:rPr>
+              <a:t> (a programming platform designed specifically for engineers and scientists for Data Analysis, Developing Algorithms, Create Models and applications etc).</a:t>
+            </a:r>
+            <a:endParaRPr lang="en-IN" altLang="en-US" sz="1800" b="1">
+              <a:solidFill>
+                <a:schemeClr val="accent2"/>
+              </a:solidFill>
+            </a:endParaRPr>
+          </a:p>
+          <a:p>
+            <a:pPr marL="0" indent="0">
+              <a:buNone/>
+            </a:pPr>
+            <a:endParaRPr lang="en-IN" altLang="en-US" sz="1800" b="1">
+              <a:solidFill>
+                <a:schemeClr val="accent2"/>
+              </a:solidFill>
+            </a:endParaRPr>
+          </a:p>
+          <a:p>
+            <a:pPr marL="0" indent="0">
+              <a:buNone/>
+            </a:pPr>
+            <a:r>
+              <a:rPr lang="en-IN" altLang="en-US" sz="1800" b="1">
+                <a:solidFill>
+                  <a:schemeClr val="accent2"/>
+                </a:solidFill>
+              </a:rPr>
+              <a:t>. Numpy is used with packages link </a:t>
+            </a:r>
+            <a:r>
+              <a:rPr lang="en-IN" altLang="en-US" sz="1800" b="1">
+                <a:solidFill>
+                  <a:srgbClr val="FF0000"/>
+                </a:solidFill>
+              </a:rPr>
+              <a:t>Scipy(Scientific python)</a:t>
+            </a:r>
+            <a:r>
+              <a:rPr lang="en-IN" altLang="en-US" sz="1800" b="1">
+                <a:solidFill>
+                  <a:schemeClr val="accent2"/>
+                </a:solidFill>
+              </a:rPr>
+              <a:t> and </a:t>
+            </a:r>
+            <a:r>
+              <a:rPr lang="en-IN" altLang="en-US" sz="1800" b="1">
+                <a:solidFill>
+                  <a:srgbClr val="FF0000"/>
+                </a:solidFill>
+              </a:rPr>
+              <a:t>Mat-Plotlib (Plotting Library)</a:t>
+            </a:r>
+            <a:r>
+              <a:rPr lang="en-IN" altLang="en-US" sz="1800" b="1">
+                <a:solidFill>
+                  <a:schemeClr val="accent2"/>
+                </a:solidFill>
+              </a:rPr>
+              <a:t> and this makes it capable to replace MatLab.</a:t>
+            </a:r>
+            <a:endParaRPr lang="en-IN" altLang="en-US" sz="1800" b="1">
+              <a:solidFill>
+                <a:schemeClr val="accent2"/>
+              </a:solidFill>
+            </a:endParaRPr>
+          </a:p>
+          <a:p>
+            <a:pPr marL="0" indent="0">
+              <a:buNone/>
+            </a:pPr>
+            <a:endParaRPr lang="en-IN" altLang="en-US" sz="1800" b="1">
+              <a:solidFill>
+                <a:schemeClr val="accent2"/>
+              </a:solidFill>
+            </a:endParaRPr>
+          </a:p>
+          <a:p>
+            <a:pPr marL="0" indent="0">
+              <a:buNone/>
+            </a:pPr>
+            <a:r>
+              <a:rPr lang="en-IN" altLang="en-US" sz="2400" b="1">
+                <a:solidFill>
+                  <a:schemeClr val="accent2"/>
+                </a:solidFill>
+              </a:rPr>
+              <a:t>1.  1 Dimensional Array id referred to as Vector.</a:t>
+            </a:r>
+            <a:endParaRPr lang="en-IN" altLang="en-US" sz="2400" b="1">
+              <a:solidFill>
+                <a:schemeClr val="accent2"/>
+              </a:solidFill>
+            </a:endParaRPr>
+          </a:p>
+          <a:p>
+            <a:pPr marL="0" indent="0">
+              <a:buNone/>
+            </a:pPr>
+            <a:r>
+              <a:rPr lang="en-IN" altLang="en-US" sz="2400" b="1">
+                <a:solidFill>
+                  <a:schemeClr val="accent2"/>
+                </a:solidFill>
+              </a:rPr>
+              <a:t>2.  2 Dimensional Array is referred to as Matrix.</a:t>
+            </a:r>
+            <a:endParaRPr lang="en-IN" altLang="en-US" sz="2400" b="1">
+              <a:solidFill>
+                <a:schemeClr val="accent2"/>
+              </a:solidFill>
+            </a:endParaRPr>
+          </a:p>
+          <a:p>
+            <a:pPr marL="0" indent="0">
+              <a:buNone/>
+            </a:pPr>
+            <a:r>
+              <a:rPr lang="en-IN" altLang="en-US" sz="2400" b="1">
+                <a:solidFill>
+                  <a:schemeClr val="accent2"/>
+                </a:solidFill>
+              </a:rPr>
+              <a:t>3.  3 Dimensional Array is referred to as Tensor</a:t>
+            </a:r>
+            <a:endParaRPr lang="en-IN" altLang="en-US" sz="2400" b="1">
+              <a:solidFill>
+                <a:schemeClr val="accent2"/>
+              </a:solidFill>
+            </a:endParaRPr>
+          </a:p>
+        </p:txBody>
+      </p:sp>
+    </p:spTree>
+  </p:cSld>
+  <p:clrMapOvr>
+    <a:masterClrMapping/>
+  </p:clrMapOvr>
+</p:sld>
+</file>
+
+<file path=ppt/slides/slide5.xml><?xml version="1.0" encoding="utf-8"?>
 <p:sld xmlns:a="http://schemas.openxmlformats.org/drawingml/2006/main" xmlns:r="http://schemas.openxmlformats.org/officeDocument/2006/relationships" xmlns:p="http://schemas.openxmlformats.org/presentationml/2006/main">
   <p:cSld>
     <p:spTree>
@@ -6025,7 +6512,7 @@
 </p:sld>
 </file>
 
-<file path=ppt/slides/slide5.xml><?xml version="1.0" encoding="utf-8"?>
+<file path=ppt/slides/slide6.xml><?xml version="1.0" encoding="utf-8"?>
 <p:sld xmlns:a="http://schemas.openxmlformats.org/drawingml/2006/main" xmlns:r="http://schemas.openxmlformats.org/officeDocument/2006/relationships" xmlns:p="http://schemas.openxmlformats.org/presentationml/2006/main">
   <p:cSld>
     <p:spTree>
@@ -6091,78 +6578,6 @@
 </p:sld>
 </file>
 
-<file path=ppt/slides/slide6.xml><?xml version="1.0" encoding="utf-8"?>
-<p:sld xmlns:a="http://schemas.openxmlformats.org/drawingml/2006/main" xmlns:r="http://schemas.openxmlformats.org/officeDocument/2006/relationships" xmlns:p="http://schemas.openxmlformats.org/presentationml/2006/main">
-  <p:cSld>
-    <p:spTree>
-      <p:nvGrpSpPr>
-        <p:cNvPr id="1" name=""/>
-        <p:cNvGrpSpPr/>
-        <p:nvPr/>
-      </p:nvGrpSpPr>
-      <p:grpSpPr/>
-      <p:sp>
-        <p:nvSpPr>
-          <p:cNvPr id="2" name="Title 1"/>
-          <p:cNvSpPr>
-            <a:spLocks noGrp="1"/>
-          </p:cNvSpPr>
-          <p:nvPr>
-            <p:ph type="title"/>
-          </p:nvPr>
-        </p:nvSpPr>
-        <p:spPr/>
-        <p:txBody>
-          <a:bodyPr/>
-          <a:p>
-            <a:r>
-              <a:rPr lang="en-US"/>
-              <a:t>Creating Arrays with Dimensions</a:t>
-            </a:r>
-            <a:endParaRPr lang="en-US"/>
-          </a:p>
-        </p:txBody>
-      </p:sp>
-      <p:sp>
-        <p:nvSpPr>
-          <p:cNvPr id="3" name="Content Placeholder 2"/>
-          <p:cNvSpPr>
-            <a:spLocks noGrp="1"/>
-          </p:cNvSpPr>
-          <p:nvPr>
-            <p:ph idx="1"/>
-          </p:nvPr>
-        </p:nvSpPr>
-        <p:spPr/>
-        <p:txBody>
-          <a:bodyPr/>
-          <a:p>
-            <a:r>
-              <a:rPr lang="en-US"/>
-              <a:t>NumPy is used to work with arrays. The array object in NumPy is called ndarray.</a:t>
-            </a:r>
-            <a:endParaRPr lang="en-US"/>
-          </a:p>
-          <a:p>
-            <a:endParaRPr lang="en-US"/>
-          </a:p>
-          <a:p>
-            <a:r>
-              <a:rPr lang="en-US"/>
-              <a:t>We can create a NumPy ndarray object by using the array() function.</a:t>
-            </a:r>
-            <a:endParaRPr lang="en-US"/>
-          </a:p>
-        </p:txBody>
-      </p:sp>
-    </p:spTree>
-  </p:cSld>
-  <p:clrMapOvr>
-    <a:masterClrMapping/>
-  </p:clrMapOvr>
-</p:sld>
-</file>
-
 <file path=ppt/slides/slide7.xml><?xml version="1.0" encoding="utf-8"?>
 <p:sld xmlns:a="http://schemas.openxmlformats.org/drawingml/2006/main" xmlns:r="http://schemas.openxmlformats.org/officeDocument/2006/relationships" xmlns:p="http://schemas.openxmlformats.org/presentationml/2006/main">
   <p:cSld>
@@ -6189,7 +6604,7 @@
           <a:p>
             <a:r>
               <a:rPr lang="en-US"/>
-              <a:t>Dimensions in Arrays</a:t>
+              <a:t>Creating Arrays with Dimensions</a:t>
             </a:r>
             <a:endParaRPr lang="en-US"/>
           </a:p>
@@ -6210,16 +6625,20 @@
           <a:bodyPr/>
           <a:p>
             <a:r>
-              <a:rPr lang="en-US" sz="2400"/>
-              <a:t>A dimension in arrays is one level of array depth (nested arrays).</a:t>
-            </a:r>
-            <a:endParaRPr lang="en-US" sz="2400"/>
-          </a:p>
-          <a:p>
-            <a:pPr marL="0" indent="0">
-              <a:buNone/>
-            </a:pPr>
-            <a:endParaRPr lang="en-IN" altLang="en-US" sz="2400"/>
+              <a:rPr lang="en-US"/>
+              <a:t>NumPy is used to work with arrays. The array object in NumPy is called ndarray.</a:t>
+            </a:r>
+            <a:endParaRPr lang="en-US"/>
+          </a:p>
+          <a:p>
+            <a:endParaRPr lang="en-US"/>
+          </a:p>
+          <a:p>
+            <a:r>
+              <a:rPr lang="en-US"/>
+              <a:t>We can create a NumPy ndarray object by using the array() function.</a:t>
+            </a:r>
+            <a:endParaRPr lang="en-US"/>
           </a:p>
         </p:txBody>
       </p:sp>
@@ -6257,7 +6676,7 @@
           <a:p>
             <a:r>
               <a:rPr lang="en-US"/>
-              <a:t>0-D Arrays</a:t>
+              <a:t>Dimensions in Arrays</a:t>
             </a:r>
             <a:endParaRPr lang="en-US"/>
           </a:p>
@@ -6278,58 +6697,16 @@
           <a:bodyPr/>
           <a:p>
             <a:r>
-              <a:rPr lang="en-IN" altLang="en-US"/>
-              <a:t>0-D arrays, or Scalars, are the elements in an array. Each value in an array is a 0-D array.</a:t>
-            </a:r>
-            <a:endParaRPr lang="en-IN" altLang="en-US"/>
-          </a:p>
-          <a:p>
-            <a:endParaRPr lang="en-IN" altLang="en-US"/>
-          </a:p>
-          <a:p>
-            <a:r>
-              <a:rPr lang="en-IN" altLang="en-US" b="1">
-                <a:solidFill>
-                  <a:srgbClr val="FF0000"/>
-                </a:solidFill>
-              </a:rPr>
-              <a:t>import numpy as np</a:t>
-            </a:r>
-            <a:endParaRPr lang="en-IN" altLang="en-US" b="1">
-              <a:solidFill>
-                <a:srgbClr val="FF0000"/>
-              </a:solidFill>
-            </a:endParaRPr>
-          </a:p>
-          <a:p>
-            <a:r>
-              <a:rPr lang="en-IN" altLang="en-US" b="1">
-                <a:solidFill>
-                  <a:srgbClr val="FF0000"/>
-                </a:solidFill>
-              </a:rPr>
-              <a:t>arr = np.array(42)</a:t>
-            </a:r>
-            <a:endParaRPr lang="en-IN" altLang="en-US" b="1">
-              <a:solidFill>
-                <a:srgbClr val="FF0000"/>
-              </a:solidFill>
-            </a:endParaRPr>
-          </a:p>
-          <a:p>
-            <a:r>
-              <a:rPr lang="en-IN" altLang="en-US" b="1">
-                <a:solidFill>
-                  <a:srgbClr val="FF0000"/>
-                </a:solidFill>
-              </a:rPr>
-              <a:t>print(arr)</a:t>
-            </a:r>
-            <a:r>
-              <a:rPr lang="en-IN" altLang="en-US"/>
-              <a:t>	</a:t>
-            </a:r>
-            <a:endParaRPr lang="en-IN" altLang="en-US"/>
+              <a:rPr lang="en-US" sz="2400"/>
+              <a:t>A dimension in arrays is one level of array depth (nested arrays).</a:t>
+            </a:r>
+            <a:endParaRPr lang="en-US" sz="2400"/>
+          </a:p>
+          <a:p>
+            <a:pPr marL="0" indent="0">
+              <a:buNone/>
+            </a:pPr>
+            <a:endParaRPr lang="en-IN" altLang="en-US" sz="2400"/>
           </a:p>
         </p:txBody>
       </p:sp>
@@ -6366,10 +6743,8 @@
           <a:bodyPr/>
           <a:p>
             <a:r>
-              <a:rPr lang="en-US">
-                <a:sym typeface="+mn-ea"/>
-              </a:rPr>
-              <a:t>1-D array.</a:t>
+              <a:rPr lang="en-US"/>
+              <a:t>0-D Arrays</a:t>
             </a:r>
             <a:endParaRPr lang="en-US"/>
           </a:p>
@@ -6390,107 +6765,58 @@
           <a:bodyPr/>
           <a:p>
             <a:r>
-              <a:rPr lang="en-US"/>
-              <a:t>An array that has 0-D arrays as its elements is called uni-dimensional or 1-D array.</a:t>
-            </a:r>
-            <a:endParaRPr lang="en-US"/>
-          </a:p>
-          <a:p>
-            <a:r>
-              <a:rPr lang="en-US"/>
-              <a:t>These are the most common and basic arrays.</a:t>
-            </a:r>
-            <a:endParaRPr lang="en-US"/>
-          </a:p>
-          <a:p>
-            <a:endParaRPr lang="en-US"/>
-          </a:p>
-          <a:p>
-            <a:r>
-              <a:rPr lang="en-US" b="1">
+              <a:rPr lang="en-IN" altLang="en-US"/>
+              <a:t>0-D arrays, or Scalars, are the elements in an array. Each value in an array is a 0-D array.</a:t>
+            </a:r>
+            <a:endParaRPr lang="en-IN" altLang="en-US"/>
+          </a:p>
+          <a:p>
+            <a:endParaRPr lang="en-IN" altLang="en-US"/>
+          </a:p>
+          <a:p>
+            <a:r>
+              <a:rPr lang="en-IN" altLang="en-US" b="1">
                 <a:solidFill>
                   <a:srgbClr val="FF0000"/>
                 </a:solidFill>
-                <a:effectLst>
-                  <a:outerShdw blurRad="38100" dist="19050" dir="2700000" algn="tl" rotWithShape="0">
-                    <a:schemeClr val="dk1">
-                      <a:alpha val="40000"/>
-                    </a:schemeClr>
-                  </a:outerShdw>
-                </a:effectLst>
               </a:rPr>
               <a:t>import numpy as np</a:t>
             </a:r>
-            <a:endParaRPr lang="en-US" b="1">
+            <a:endParaRPr lang="en-IN" altLang="en-US" b="1">
               <a:solidFill>
                 <a:srgbClr val="FF0000"/>
               </a:solidFill>
-              <a:effectLst>
-                <a:outerShdw blurRad="38100" dist="19050" dir="2700000" algn="tl" rotWithShape="0">
-                  <a:schemeClr val="dk1">
-                    <a:alpha val="40000"/>
-                  </a:schemeClr>
-                </a:outerShdw>
-              </a:effectLst>
             </a:endParaRPr>
           </a:p>
           <a:p>
             <a:r>
-              <a:rPr lang="en-US" b="1">
+              <a:rPr lang="en-IN" altLang="en-US" b="1">
                 <a:solidFill>
                   <a:srgbClr val="FF0000"/>
                 </a:solidFill>
-                <a:effectLst>
-                  <a:outerShdw blurRad="38100" dist="19050" dir="2700000" algn="tl" rotWithShape="0">
-                    <a:schemeClr val="dk1">
-                      <a:alpha val="40000"/>
-                    </a:schemeClr>
-                  </a:outerShdw>
-                </a:effectLst>
               </a:rPr>
-              <a:t>arr = np.array([1, 2, 3, 4, 5])</a:t>
-            </a:r>
-            <a:endParaRPr lang="en-US" b="1">
+              <a:t>arr = np.array(42)</a:t>
+            </a:r>
+            <a:endParaRPr lang="en-IN" altLang="en-US" b="1">
               <a:solidFill>
                 <a:srgbClr val="FF0000"/>
               </a:solidFill>
-              <a:effectLst>
-                <a:outerShdw blurRad="38100" dist="19050" dir="2700000" algn="tl" rotWithShape="0">
-                  <a:schemeClr val="dk1">
-                    <a:alpha val="40000"/>
-                  </a:schemeClr>
-                </a:outerShdw>
-              </a:effectLst>
             </a:endParaRPr>
           </a:p>
           <a:p>
             <a:r>
-              <a:rPr lang="en-US" b="1">
+              <a:rPr lang="en-IN" altLang="en-US" b="1">
                 <a:solidFill>
                   <a:srgbClr val="FF0000"/>
                 </a:solidFill>
-                <a:effectLst>
-                  <a:outerShdw blurRad="38100" dist="19050" dir="2700000" algn="tl" rotWithShape="0">
-                    <a:schemeClr val="dk1">
-                      <a:alpha val="40000"/>
-                    </a:schemeClr>
-                  </a:outerShdw>
-                </a:effectLst>
               </a:rPr>
               <a:t>print(arr)</a:t>
             </a:r>
-            <a:endParaRPr lang="en-US" b="1">
-              <a:solidFill>
-                <a:srgbClr val="FF0000"/>
-              </a:solidFill>
-              <a:effectLst>
-                <a:outerShdw blurRad="38100" dist="19050" dir="2700000" algn="tl" rotWithShape="0">
-                  <a:schemeClr val="dk1">
-                    <a:alpha val="40000"/>
-                  </a:schemeClr>
-                </a:outerShdw>
-              </a:effectLst>
-            </a:endParaRPr>
+            <a:r>
+              <a:rPr lang="en-IN" altLang="en-US"/>
+              <a:t>	</a:t>
+            </a:r>
+            <a:endParaRPr lang="en-IN" altLang="en-US"/>
           </a:p>
         </p:txBody>
       </p:sp>
